--- a/IV_Cloud Provider Architecture.pptx
+++ b/IV_Cloud Provider Architecture.pptx
@@ -5256,86 +5256,27 @@
           <a:p>
             <a:pPr algn="l"/>
             <a:r>
-              <a:rPr lang="en-US" b="1" dirty="0">
-                <a:cs typeface="Times New Roman" pitchFamily="18" charset="0"/>
-              </a:rPr>
-              <a:t>Cloud Computing </a:t>
-            </a:r>
-            <a:endParaRPr lang="en-US" b="1" dirty="0" smtClean="0">
-              <a:cs typeface="Times New Roman" pitchFamily="18" charset="0"/>
-            </a:endParaRPr>
-          </a:p>
-          <a:p>
-            <a:pPr algn="l"/>
-            <a:r>
               <a:rPr lang="en-US" sz="9600" b="1" dirty="0" smtClean="0">
                 <a:solidFill>
-                  <a:srgbClr val="002060"/>
+                  <a:srgbClr val="00B050"/>
+                </a:solidFill>
+              </a:rPr>
+              <a:t>Choosing</a:t>
+            </a:r>
+          </a:p>
+          <a:p>
+            <a:pPr algn="l"/>
+            <a:r>
+              <a:rPr lang="en-US" sz="14400" b="1" dirty="0" smtClean="0">
+                <a:solidFill>
+                  <a:srgbClr val="7030A0"/>
                 </a:solidFill>
               </a:rPr>
               <a:t>Cloud provider</a:t>
             </a:r>
-            <a:endParaRPr lang="en-US" sz="9600" dirty="0">
+            <a:endParaRPr lang="en-US" sz="14400" dirty="0">
               <a:solidFill>
-                <a:srgbClr val="00B0F0"/>
-              </a:solidFill>
-            </a:endParaRPr>
-          </a:p>
-        </p:txBody>
-      </p:sp>
-      <p:sp>
-        <p:nvSpPr>
-          <p:cNvPr id="27" name="Title 1"/>
-          <p:cNvSpPr txBox="1">
-            <a:spLocks/>
-          </p:cNvSpPr>
-          <p:nvPr/>
-        </p:nvSpPr>
-        <p:spPr>
-          <a:xfrm>
-            <a:off x="2206117" y="4028116"/>
-            <a:ext cx="8567391" cy="670761"/>
-          </a:xfrm>
-          <a:prstGeom prst="rect">
-            <a:avLst/>
-          </a:prstGeom>
-        </p:spPr>
-        <p:txBody>
-          <a:bodyPr vert="horz" lIns="91440" tIns="45720" rIns="91440" bIns="45720" rtlCol="0" anchor="b">
-            <a:normAutofit fontScale="97500"/>
-          </a:bodyPr>
-          <a:lstStyle>
-            <a:lvl1pPr algn="ctr" defTabSz="914400" rtl="0" eaLnBrk="1" latinLnBrk="0" hangingPunct="1">
-              <a:lnSpc>
-                <a:spcPct val="90000"/>
-              </a:lnSpc>
-              <a:spcBef>
-                <a:spcPct val="0"/>
-              </a:spcBef>
-              <a:buNone/>
-              <a:defRPr sz="6000" kern="1200">
-                <a:solidFill>
-                  <a:schemeClr val="tx1"/>
-                </a:solidFill>
-                <a:latin typeface="+mj-lt"/>
-                <a:ea typeface="+mj-ea"/>
-                <a:cs typeface="+mj-cs"/>
-              </a:defRPr>
-            </a:lvl1pPr>
-          </a:lstStyle>
-          <a:p>
-            <a:pPr lvl="2" algn="just"/>
-            <a:r>
-              <a:rPr lang="en-US" sz="2800" dirty="0" smtClean="0">
-                <a:solidFill>
-                  <a:srgbClr val="00B0F0"/>
-                </a:solidFill>
-              </a:rPr>
-              <a:t>Architecture</a:t>
-            </a:r>
-            <a:endParaRPr lang="en-US" sz="2800" dirty="0">
-              <a:solidFill>
-                <a:srgbClr val="00B0F0"/>
+                <a:srgbClr val="7030A0"/>
               </a:solidFill>
             </a:endParaRPr>
           </a:p>
